--- a/curso/pptx/S20.pptx
+++ b/curso/pptx/S20.pptx
@@ -5233,7 +5233,7 @@
                 </a:solidFill>
                 <a:latin typeface="Nunito Sans"/>
               </a:rPr>
-              <a:t>«O todo o nada»</a:t>
+              <a:t>“要么全部，要么什么都没有”</a:t>
             </a:r>
           </a:p>
           <a:p>
@@ -5258,7 +5258,7 @@
                 </a:solidFill>
                 <a:latin typeface="Nunito Sans"/>
               </a:rPr>
-              <a:t>Esconde las opciones del medio</a:t>
+              <a:t>把中间的选项藏起来</a:t>
             </a:r>
           </a:p>
           <a:p>
@@ -5283,7 +5283,7 @@
                 </a:solidFill>
                 <a:latin typeface="Nunito Sans"/>
               </a:rPr>
-              <a:t>Te empuja hacia la opción que quiere el otro</a:t>
+              <a:t>把你推向对方想要的选项</a:t>
             </a:r>
           </a:p>
         </p:txBody>
@@ -5413,7 +5413,7 @@
                 </a:solidFill>
                 <a:latin typeface="Nunito Sans"/>
               </a:rPr>
-              <a:t>Las dos opciones son de verdad las únicas</a:t>
+              <a:t>这两个选项确实是仅有的</a:t>
             </a:r>
           </a:p>
           <a:p>
@@ -5438,7 +5438,7 @@
                 </a:solidFill>
                 <a:latin typeface="Nunito Sans"/>
               </a:rPr>
-              <a:t>Elegir una impide la otra</a:t>
+              <a:t>选一个就不能选另一个</a:t>
             </a:r>
           </a:p>
           <a:p>
@@ -5463,7 +5463,7 @@
                 </a:solidFill>
                 <a:latin typeface="Nunito Sans"/>
               </a:rPr>
-              <a:t>Se puede comprobar que no hay más</a:t>
+              <a:t>可以核实没有别的选项</a:t>
             </a:r>
           </a:p>
         </p:txBody>
@@ -7257,7 +7257,7 @@
                 </a:solidFill>
                 <a:latin typeface="Nunito Sans"/>
               </a:rPr>
-              <a:t>Dilema</a:t>
+              <a:t>两难</a:t>
             </a:r>
             <a:r>
               <a:rPr sz="2800" b="0">
@@ -7266,7 +7266,7 @@
                 </a:solidFill>
                 <a:latin typeface="Nunito Sans"/>
               </a:rPr>
-              <a:t>: tener que elegir entre dos opciones</a:t>
+              <a:t>：必须在两个选项里选一个</a:t>
             </a:r>
           </a:p>
           <a:p>
@@ -7291,7 +7291,7 @@
                 </a:solidFill>
                 <a:latin typeface="Nunito Sans"/>
               </a:rPr>
-              <a:t>Suele sonar así: «o… o…»</a:t>
+              <a:t>听起来通常是这样：“要么……要么……”</a:t>
             </a:r>
           </a:p>
           <a:p>
@@ -7316,7 +7316,7 @@
                 </a:solidFill>
                 <a:latin typeface="Nunito Sans"/>
               </a:rPr>
-              <a:t>Suele empujarte hacia la opción que quiere el otro</a:t>
+              <a:t>常常把你推向对方想要的那个选项</a:t>
             </a:r>
           </a:p>
           <a:p>
@@ -7341,7 +7341,7 @@
                 </a:solidFill>
                 <a:latin typeface="Nunito Sans"/>
               </a:rPr>
-              <a:t>Pregunta: </a:t>
+              <a:t>要问：</a:t>
             </a:r>
             <a:r>
               <a:rPr sz="2800" b="1">
@@ -7350,7 +7350,7 @@
                 </a:solidFill>
                 <a:latin typeface="Nunito Sans"/>
               </a:rPr>
-              <a:t>¿seguro que no hay una tercera opción?</a:t>
+              <a:t>真的没有第三个选项吗？</a:t>
             </a:r>
           </a:p>
         </p:txBody>
@@ -7502,7 +7502,7 @@
                 </a:solidFill>
                 <a:latin typeface="Nunito Sans"/>
               </a:rPr>
-              <a:t>En medio:</a:t>
+              <a:t>在中间：</a:t>
             </a:r>
             <a:r>
               <a:rPr sz="2800" b="0">
@@ -7511,7 +7511,7 @@
                 </a:solidFill>
                 <a:latin typeface="Nunito Sans"/>
               </a:rPr>
-              <a:t> ni todo ni nada, un poco</a:t>
+              <a:t>不是全部也不是什么都没有，一点点</a:t>
             </a:r>
           </a:p>
           <a:p>
@@ -7536,7 +7536,7 @@
                 </a:solidFill>
                 <a:latin typeface="Nunito Sans"/>
               </a:rPr>
-              <a:t>Las dos a la vez:</a:t>
+              <a:t>两个同时：</a:t>
             </a:r>
             <a:r>
               <a:rPr sz="2800" b="0">
@@ -7545,7 +7545,7 @@
                 </a:solidFill>
                 <a:latin typeface="Nunito Sans"/>
               </a:rPr>
-              <a:t> estudiar y también jugar</a:t>
+              <a:t>既学习，也玩</a:t>
             </a:r>
           </a:p>
           <a:p>
@@ -7570,7 +7570,7 @@
                 </a:solidFill>
                 <a:latin typeface="Nunito Sans"/>
               </a:rPr>
-              <a:t>Ninguna de las dos:</a:t>
+              <a:t>两个都不要：</a:t>
             </a:r>
             <a:r>
               <a:rPr sz="2800" b="0">
@@ -7579,7 +7579,7 @@
                 </a:solidFill>
                 <a:latin typeface="Nunito Sans"/>
               </a:rPr>
-              <a:t> otra cosa distinta</a:t>
+              <a:t>另一个不同的做法</a:t>
             </a:r>
           </a:p>
           <a:p>
@@ -7604,7 +7604,7 @@
                 </a:solidFill>
                 <a:latin typeface="Nunito Sans"/>
               </a:rPr>
-              <a:t>Más tarde:</a:t>
+              <a:t>以后：</a:t>
             </a:r>
             <a:r>
               <a:rPr sz="2800" b="0">
@@ -7613,7 +7613,7 @@
                 </a:solidFill>
                 <a:latin typeface="Nunito Sans"/>
               </a:rPr>
-              <a:t> hoy no, otro día sí</a:t>
+              <a:t>今天不行，改天可以</a:t>
             </a:r>
           </a:p>
         </p:txBody>

--- a/curso/pptx/S20.pptx
+++ b/curso/pptx/S20.pptx
@@ -4129,7 +4129,7 @@
                 </a:solidFill>
                 <a:latin typeface="Nunito Sans"/>
               </a:rPr>
-              <a:t>迪伦的爸爸：“要么你永远不玩电子游戏，要么你每门都不及格。”</a:t>
+              <a:t>一个男孩的爸爸：“要么你永远不玩电子游戏，要么你每门都不及格。”</a:t>
             </a:r>
           </a:p>
         </p:txBody>
@@ -4438,7 +4438,7 @@
                 </a:solidFill>
                 <a:latin typeface="Nunito Sans"/>
               </a:rPr>
-              <a:t>蕾雷有一张演唱会的票，还有一张比赛的票。两个都是星期六六点，在毕尔巴鄂的不同地方。</a:t>
+              <a:t>一个女孩有一张演唱会的票，还有一张比赛的票。两个都是星期六六点，在毕尔巴鄂的不同地方。</a:t>
             </a:r>
           </a:p>
         </p:txBody>
@@ -4747,7 +4747,7 @@
                 </a:solidFill>
                 <a:latin typeface="Nunito Sans"/>
               </a:rPr>
-              <a:t>视频助理裁判（VAR）在回看一次进攻：“要么球整个越过了线，要么没有越过。”凯文：“虚假两难！它只给了两个选项。”</a:t>
+              <a:t>视频助理裁判（VAR）在回看一次进攻：“要么球整个越过了线，要么没有越过。”一个男孩：“虚假两难！它只给了两个选项。”</a:t>
             </a:r>
           </a:p>
         </p:txBody>
@@ -4795,7 +4795,7 @@
                 </a:solidFill>
                 <a:latin typeface="Nunito Sans"/>
               </a:rPr>
-              <a:t>它有“要么……要么……”的形式。凯文说得对吗？</a:t>
+              <a:t>它有“要么……要么……”的形式。这个男孩说得对吗？</a:t>
             </a:r>
           </a:p>
           <a:p>
